--- a/public/videos/repositories/local-board-alert/local-board-alert-tech-preview.pptx
+++ b/public/videos/repositories/local-board-alert/local-board-alert-tech-preview.pptx
@@ -134,7 +134,7 @@
           <p:cNvPr id="2" name="タイトル 1">
             <a:extLst>
               <a:ext uri="{FF2B5EF4-FFF2-40B4-BE49-F238E27FC236}">
-                <a16:creationId xmlns:a16="http://schemas.microsoft.com/office/drawing/2014/main" id="{976F7C52-205E-3584-2AA7-2556C07AA5CE}"/>
+                <a16:creationId xmlns:a16="http://schemas.microsoft.com/office/drawing/2014/main" id="{D439117F-1F11-F3FA-EB10-34AA64FFD395}"/>
               </a:ext>
             </a:extLst>
           </p:cNvPr>
@@ -171,7 +171,7 @@
           <p:cNvPr id="3" name="字幕 2">
             <a:extLst>
               <a:ext uri="{FF2B5EF4-FFF2-40B4-BE49-F238E27FC236}">
-                <a16:creationId xmlns:a16="http://schemas.microsoft.com/office/drawing/2014/main" id="{23CAF430-4394-B4FA-EFB8-9689215AA9DC}"/>
+                <a16:creationId xmlns:a16="http://schemas.microsoft.com/office/drawing/2014/main" id="{B8857665-6E06-93D2-6818-00A6D60D6D79}"/>
               </a:ext>
             </a:extLst>
           </p:cNvPr>
@@ -241,7 +241,7 @@
           <p:cNvPr id="4" name="日付プレースホルダー 3">
             <a:extLst>
               <a:ext uri="{FF2B5EF4-FFF2-40B4-BE49-F238E27FC236}">
-                <a16:creationId xmlns:a16="http://schemas.microsoft.com/office/drawing/2014/main" id="{2A71ACD7-DC57-AD18-B928-3CCC1A6B63F4}"/>
+                <a16:creationId xmlns:a16="http://schemas.microsoft.com/office/drawing/2014/main" id="{3DF7226A-3623-2D3C-1FA1-CCACAD98C620}"/>
               </a:ext>
             </a:extLst>
           </p:cNvPr>
@@ -257,7 +257,7 @@
           <a:bodyPr/>
           <a:lstStyle/>
           <a:p>
-            <a:fld id="{60D0C79B-3C87-4C97-8456-3ACA0AF5688F}" type="datetimeFigureOut">
+            <a:fld id="{FABA0CEF-6B6F-4C75-A92D-568F72159570}" type="datetimeFigureOut">
               <a:rPr kumimoji="1" lang="ja-JP" altLang="en-US" smtClean="0"/>
               <a:t>2026/7/30</a:t>
             </a:fld>
@@ -270,7 +270,7 @@
           <p:cNvPr id="5" name="フッター プレースホルダー 4">
             <a:extLst>
               <a:ext uri="{FF2B5EF4-FFF2-40B4-BE49-F238E27FC236}">
-                <a16:creationId xmlns:a16="http://schemas.microsoft.com/office/drawing/2014/main" id="{E1F5ECD2-2B20-F550-ADE1-5424DD7FB467}"/>
+                <a16:creationId xmlns:a16="http://schemas.microsoft.com/office/drawing/2014/main" id="{8CADD427-F65C-F1E0-33AC-395C4042EB27}"/>
               </a:ext>
             </a:extLst>
           </p:cNvPr>
@@ -295,7 +295,7 @@
           <p:cNvPr id="6" name="スライド番号プレースホルダー 5">
             <a:extLst>
               <a:ext uri="{FF2B5EF4-FFF2-40B4-BE49-F238E27FC236}">
-                <a16:creationId xmlns:a16="http://schemas.microsoft.com/office/drawing/2014/main" id="{6ADCA6B5-5D6E-C5F9-3769-6D403FDEDCE0}"/>
+                <a16:creationId xmlns:a16="http://schemas.microsoft.com/office/drawing/2014/main" id="{79B63B8F-2AA1-DE27-6CDD-19AF67610291}"/>
               </a:ext>
             </a:extLst>
           </p:cNvPr>
@@ -311,7 +311,7 @@
           <a:bodyPr/>
           <a:lstStyle/>
           <a:p>
-            <a:fld id="{58FD96F2-E146-432C-99C1-E05DA8086B69}" type="slidenum">
+            <a:fld id="{DCD6F61F-B9FE-4C34-94D9-5BC0C4D05291}" type="slidenum">
               <a:rPr kumimoji="1" lang="ja-JP" altLang="en-US" smtClean="0"/>
               <a:t>‹#›</a:t>
             </a:fld>
@@ -322,7 +322,7 @@
     </p:spTree>
     <p:extLst>
       <p:ext uri="{BB962C8B-B14F-4D97-AF65-F5344CB8AC3E}">
-        <p14:creationId xmlns:p14="http://schemas.microsoft.com/office/powerpoint/2010/main" val="4275410301"/>
+        <p14:creationId xmlns:p14="http://schemas.microsoft.com/office/powerpoint/2010/main" val="2679647460"/>
       </p:ext>
     </p:extLst>
   </p:cSld>
@@ -354,7 +354,7 @@
           <p:cNvPr id="2" name="タイトル 1">
             <a:extLst>
               <a:ext uri="{FF2B5EF4-FFF2-40B4-BE49-F238E27FC236}">
-                <a16:creationId xmlns:a16="http://schemas.microsoft.com/office/drawing/2014/main" id="{C82706A0-B7F8-F55D-E625-1E999F6B4D74}"/>
+                <a16:creationId xmlns:a16="http://schemas.microsoft.com/office/drawing/2014/main" id="{BD85CCC7-6AAA-4B8B-C50D-61FB62FD4355}"/>
               </a:ext>
             </a:extLst>
           </p:cNvPr>
@@ -382,7 +382,7 @@
           <p:cNvPr id="3" name="縦書きテキスト プレースホルダー 2">
             <a:extLst>
               <a:ext uri="{FF2B5EF4-FFF2-40B4-BE49-F238E27FC236}">
-                <a16:creationId xmlns:a16="http://schemas.microsoft.com/office/drawing/2014/main" id="{2445A35B-E069-B537-8A71-E4DEA26E04BD}"/>
+                <a16:creationId xmlns:a16="http://schemas.microsoft.com/office/drawing/2014/main" id="{32BAC683-CEC7-7E76-C27F-FEB0BB9D2A44}"/>
               </a:ext>
             </a:extLst>
           </p:cNvPr>
@@ -471,7 +471,7 @@
           <p:cNvPr id="4" name="日付プレースホルダー 3">
             <a:extLst>
               <a:ext uri="{FF2B5EF4-FFF2-40B4-BE49-F238E27FC236}">
-                <a16:creationId xmlns:a16="http://schemas.microsoft.com/office/drawing/2014/main" id="{E918736A-52CC-FB77-E131-740AEFBF87A0}"/>
+                <a16:creationId xmlns:a16="http://schemas.microsoft.com/office/drawing/2014/main" id="{B10A43C0-4556-E01E-821E-3908E5BB9A14}"/>
               </a:ext>
             </a:extLst>
           </p:cNvPr>
@@ -487,7 +487,7 @@
           <a:bodyPr/>
           <a:lstStyle/>
           <a:p>
-            <a:fld id="{60D0C79B-3C87-4C97-8456-3ACA0AF5688F}" type="datetimeFigureOut">
+            <a:fld id="{FABA0CEF-6B6F-4C75-A92D-568F72159570}" type="datetimeFigureOut">
               <a:rPr kumimoji="1" lang="ja-JP" altLang="en-US" smtClean="0"/>
               <a:t>2026/7/30</a:t>
             </a:fld>
@@ -500,7 +500,7 @@
           <p:cNvPr id="5" name="フッター プレースホルダー 4">
             <a:extLst>
               <a:ext uri="{FF2B5EF4-FFF2-40B4-BE49-F238E27FC236}">
-                <a16:creationId xmlns:a16="http://schemas.microsoft.com/office/drawing/2014/main" id="{5858747A-FDB6-4279-EA8B-7FF8C070FB8C}"/>
+                <a16:creationId xmlns:a16="http://schemas.microsoft.com/office/drawing/2014/main" id="{1D222FE5-3AC2-A83F-0E1B-BBEBB1A09282}"/>
               </a:ext>
             </a:extLst>
           </p:cNvPr>
@@ -525,7 +525,7 @@
           <p:cNvPr id="6" name="スライド番号プレースホルダー 5">
             <a:extLst>
               <a:ext uri="{FF2B5EF4-FFF2-40B4-BE49-F238E27FC236}">
-                <a16:creationId xmlns:a16="http://schemas.microsoft.com/office/drawing/2014/main" id="{E0A3189E-916F-F078-9FCE-A347E2870505}"/>
+                <a16:creationId xmlns:a16="http://schemas.microsoft.com/office/drawing/2014/main" id="{117657C4-A950-7926-7D5D-B460367F70A3}"/>
               </a:ext>
             </a:extLst>
           </p:cNvPr>
@@ -541,7 +541,7 @@
           <a:bodyPr/>
           <a:lstStyle/>
           <a:p>
-            <a:fld id="{58FD96F2-E146-432C-99C1-E05DA8086B69}" type="slidenum">
+            <a:fld id="{DCD6F61F-B9FE-4C34-94D9-5BC0C4D05291}" type="slidenum">
               <a:rPr kumimoji="1" lang="ja-JP" altLang="en-US" smtClean="0"/>
               <a:t>‹#›</a:t>
             </a:fld>
@@ -552,7 +552,7 @@
     </p:spTree>
     <p:extLst>
       <p:ext uri="{BB962C8B-B14F-4D97-AF65-F5344CB8AC3E}">
-        <p14:creationId xmlns:p14="http://schemas.microsoft.com/office/powerpoint/2010/main" val="27449284"/>
+        <p14:creationId xmlns:p14="http://schemas.microsoft.com/office/powerpoint/2010/main" val="2697543149"/>
       </p:ext>
     </p:extLst>
   </p:cSld>
@@ -584,7 +584,7 @@
           <p:cNvPr id="2" name="縦書きタイトル 1">
             <a:extLst>
               <a:ext uri="{FF2B5EF4-FFF2-40B4-BE49-F238E27FC236}">
-                <a16:creationId xmlns:a16="http://schemas.microsoft.com/office/drawing/2014/main" id="{F7EC0D24-BA5B-439F-8E0C-B2EB90494A3F}"/>
+                <a16:creationId xmlns:a16="http://schemas.microsoft.com/office/drawing/2014/main" id="{71D15BA0-4BD4-8033-66C9-E554A25C40A3}"/>
               </a:ext>
             </a:extLst>
           </p:cNvPr>
@@ -617,7 +617,7 @@
           <p:cNvPr id="3" name="縦書きテキスト プレースホルダー 2">
             <a:extLst>
               <a:ext uri="{FF2B5EF4-FFF2-40B4-BE49-F238E27FC236}">
-                <a16:creationId xmlns:a16="http://schemas.microsoft.com/office/drawing/2014/main" id="{FD306A69-003C-40BA-24AF-4764A8A263B5}"/>
+                <a16:creationId xmlns:a16="http://schemas.microsoft.com/office/drawing/2014/main" id="{F0788BAE-0CB3-1F2D-1BDB-B781ABD573BD}"/>
               </a:ext>
             </a:extLst>
           </p:cNvPr>
@@ -711,7 +711,7 @@
           <p:cNvPr id="4" name="日付プレースホルダー 3">
             <a:extLst>
               <a:ext uri="{FF2B5EF4-FFF2-40B4-BE49-F238E27FC236}">
-                <a16:creationId xmlns:a16="http://schemas.microsoft.com/office/drawing/2014/main" id="{D6D95E25-4A43-A910-41ED-8F37780E5D1F}"/>
+                <a16:creationId xmlns:a16="http://schemas.microsoft.com/office/drawing/2014/main" id="{069BBAA0-548E-1EA5-B3C6-9F8438F81C4E}"/>
               </a:ext>
             </a:extLst>
           </p:cNvPr>
@@ -727,7 +727,7 @@
           <a:bodyPr/>
           <a:lstStyle/>
           <a:p>
-            <a:fld id="{60D0C79B-3C87-4C97-8456-3ACA0AF5688F}" type="datetimeFigureOut">
+            <a:fld id="{FABA0CEF-6B6F-4C75-A92D-568F72159570}" type="datetimeFigureOut">
               <a:rPr kumimoji="1" lang="ja-JP" altLang="en-US" smtClean="0"/>
               <a:t>2026/7/30</a:t>
             </a:fld>
@@ -740,7 +740,7 @@
           <p:cNvPr id="5" name="フッター プレースホルダー 4">
             <a:extLst>
               <a:ext uri="{FF2B5EF4-FFF2-40B4-BE49-F238E27FC236}">
-                <a16:creationId xmlns:a16="http://schemas.microsoft.com/office/drawing/2014/main" id="{2338AC73-E51F-8191-CB96-28E0B28B55CE}"/>
+                <a16:creationId xmlns:a16="http://schemas.microsoft.com/office/drawing/2014/main" id="{C24E4F85-8F0E-C43B-2727-7FD01A4173A8}"/>
               </a:ext>
             </a:extLst>
           </p:cNvPr>
@@ -765,7 +765,7 @@
           <p:cNvPr id="6" name="スライド番号プレースホルダー 5">
             <a:extLst>
               <a:ext uri="{FF2B5EF4-FFF2-40B4-BE49-F238E27FC236}">
-                <a16:creationId xmlns:a16="http://schemas.microsoft.com/office/drawing/2014/main" id="{55C7D653-996A-50E2-FD8A-2E5D823A9744}"/>
+                <a16:creationId xmlns:a16="http://schemas.microsoft.com/office/drawing/2014/main" id="{51981E90-2673-2A5D-9DFF-9F5BC9F9D2E2}"/>
               </a:ext>
             </a:extLst>
           </p:cNvPr>
@@ -781,7 +781,7 @@
           <a:bodyPr/>
           <a:lstStyle/>
           <a:p>
-            <a:fld id="{58FD96F2-E146-432C-99C1-E05DA8086B69}" type="slidenum">
+            <a:fld id="{DCD6F61F-B9FE-4C34-94D9-5BC0C4D05291}" type="slidenum">
               <a:rPr kumimoji="1" lang="ja-JP" altLang="en-US" smtClean="0"/>
               <a:t>‹#›</a:t>
             </a:fld>
@@ -792,7 +792,7 @@
     </p:spTree>
     <p:extLst>
       <p:ext uri="{BB962C8B-B14F-4D97-AF65-F5344CB8AC3E}">
-        <p14:creationId xmlns:p14="http://schemas.microsoft.com/office/powerpoint/2010/main" val="3122051740"/>
+        <p14:creationId xmlns:p14="http://schemas.microsoft.com/office/powerpoint/2010/main" val="3990051339"/>
       </p:ext>
     </p:extLst>
   </p:cSld>
@@ -824,7 +824,7 @@
           <p:cNvPr id="2" name="タイトル 1">
             <a:extLst>
               <a:ext uri="{FF2B5EF4-FFF2-40B4-BE49-F238E27FC236}">
-                <a16:creationId xmlns:a16="http://schemas.microsoft.com/office/drawing/2014/main" id="{B06E6264-8AC6-BF0E-C57F-F5FC2B02F984}"/>
+                <a16:creationId xmlns:a16="http://schemas.microsoft.com/office/drawing/2014/main" id="{ED1E6412-3BEE-19CC-C89E-5F8D4F38BE2F}"/>
               </a:ext>
             </a:extLst>
           </p:cNvPr>
@@ -852,7 +852,7 @@
           <p:cNvPr id="3" name="コンテンツ プレースホルダー 2">
             <a:extLst>
               <a:ext uri="{FF2B5EF4-FFF2-40B4-BE49-F238E27FC236}">
-                <a16:creationId xmlns:a16="http://schemas.microsoft.com/office/drawing/2014/main" id="{A6FAAFCC-F8AB-142C-4B1F-C3E052B8A639}"/>
+                <a16:creationId xmlns:a16="http://schemas.microsoft.com/office/drawing/2014/main" id="{D7D2AF0A-D4BD-7581-E5A3-A0110867F4D8}"/>
               </a:ext>
             </a:extLst>
           </p:cNvPr>
@@ -941,7 +941,7 @@
           <p:cNvPr id="4" name="日付プレースホルダー 3">
             <a:extLst>
               <a:ext uri="{FF2B5EF4-FFF2-40B4-BE49-F238E27FC236}">
-                <a16:creationId xmlns:a16="http://schemas.microsoft.com/office/drawing/2014/main" id="{BF0A816B-BF6D-2A8F-652C-5B20697DBD24}"/>
+                <a16:creationId xmlns:a16="http://schemas.microsoft.com/office/drawing/2014/main" id="{64DC0292-52AC-2AFB-D4E6-F02593CD1FEA}"/>
               </a:ext>
             </a:extLst>
           </p:cNvPr>
@@ -957,7 +957,7 @@
           <a:bodyPr/>
           <a:lstStyle/>
           <a:p>
-            <a:fld id="{60D0C79B-3C87-4C97-8456-3ACA0AF5688F}" type="datetimeFigureOut">
+            <a:fld id="{FABA0CEF-6B6F-4C75-A92D-568F72159570}" type="datetimeFigureOut">
               <a:rPr kumimoji="1" lang="ja-JP" altLang="en-US" smtClean="0"/>
               <a:t>2026/7/30</a:t>
             </a:fld>
@@ -970,7 +970,7 @@
           <p:cNvPr id="5" name="フッター プレースホルダー 4">
             <a:extLst>
               <a:ext uri="{FF2B5EF4-FFF2-40B4-BE49-F238E27FC236}">
-                <a16:creationId xmlns:a16="http://schemas.microsoft.com/office/drawing/2014/main" id="{A05D8E88-4EA9-D472-387E-E86A0E152973}"/>
+                <a16:creationId xmlns:a16="http://schemas.microsoft.com/office/drawing/2014/main" id="{F1B025EC-236A-E24A-405F-3768406F45E9}"/>
               </a:ext>
             </a:extLst>
           </p:cNvPr>
@@ -995,7 +995,7 @@
           <p:cNvPr id="6" name="スライド番号プレースホルダー 5">
             <a:extLst>
               <a:ext uri="{FF2B5EF4-FFF2-40B4-BE49-F238E27FC236}">
-                <a16:creationId xmlns:a16="http://schemas.microsoft.com/office/drawing/2014/main" id="{A93888D9-0376-5619-CFFB-80A037062ACA}"/>
+                <a16:creationId xmlns:a16="http://schemas.microsoft.com/office/drawing/2014/main" id="{96FF8476-4866-789C-C990-51475665A976}"/>
               </a:ext>
             </a:extLst>
           </p:cNvPr>
@@ -1011,7 +1011,7 @@
           <a:bodyPr/>
           <a:lstStyle/>
           <a:p>
-            <a:fld id="{58FD96F2-E146-432C-99C1-E05DA8086B69}" type="slidenum">
+            <a:fld id="{DCD6F61F-B9FE-4C34-94D9-5BC0C4D05291}" type="slidenum">
               <a:rPr kumimoji="1" lang="ja-JP" altLang="en-US" smtClean="0"/>
               <a:t>‹#›</a:t>
             </a:fld>
@@ -1022,7 +1022,7 @@
     </p:spTree>
     <p:extLst>
       <p:ext uri="{BB962C8B-B14F-4D97-AF65-F5344CB8AC3E}">
-        <p14:creationId xmlns:p14="http://schemas.microsoft.com/office/powerpoint/2010/main" val="777309957"/>
+        <p14:creationId xmlns:p14="http://schemas.microsoft.com/office/powerpoint/2010/main" val="948322329"/>
       </p:ext>
     </p:extLst>
   </p:cSld>
@@ -1054,7 +1054,7 @@
           <p:cNvPr id="2" name="タイトル 1">
             <a:extLst>
               <a:ext uri="{FF2B5EF4-FFF2-40B4-BE49-F238E27FC236}">
-                <a16:creationId xmlns:a16="http://schemas.microsoft.com/office/drawing/2014/main" id="{7D1D551A-3824-D975-9590-17A423B982F3}"/>
+                <a16:creationId xmlns:a16="http://schemas.microsoft.com/office/drawing/2014/main" id="{BF508422-AE36-0140-4642-4A465C0A08B2}"/>
               </a:ext>
             </a:extLst>
           </p:cNvPr>
@@ -1091,7 +1091,7 @@
           <p:cNvPr id="3" name="テキスト プレースホルダー 2">
             <a:extLst>
               <a:ext uri="{FF2B5EF4-FFF2-40B4-BE49-F238E27FC236}">
-                <a16:creationId xmlns:a16="http://schemas.microsoft.com/office/drawing/2014/main" id="{DF7E4D76-5C30-4700-940F-D0993F9D9B06}"/>
+                <a16:creationId xmlns:a16="http://schemas.microsoft.com/office/drawing/2014/main" id="{4D17CEC2-E3B8-E69D-A782-7DF82F6DA01C}"/>
               </a:ext>
             </a:extLst>
           </p:cNvPr>
@@ -1216,7 +1216,7 @@
           <p:cNvPr id="4" name="日付プレースホルダー 3">
             <a:extLst>
               <a:ext uri="{FF2B5EF4-FFF2-40B4-BE49-F238E27FC236}">
-                <a16:creationId xmlns:a16="http://schemas.microsoft.com/office/drawing/2014/main" id="{B06D6F6D-6CF1-C893-E72E-8601C7DDCE9B}"/>
+                <a16:creationId xmlns:a16="http://schemas.microsoft.com/office/drawing/2014/main" id="{FD425932-B56D-81FC-9DE5-30BBDE9E4C5F}"/>
               </a:ext>
             </a:extLst>
           </p:cNvPr>
@@ -1232,7 +1232,7 @@
           <a:bodyPr/>
           <a:lstStyle/>
           <a:p>
-            <a:fld id="{60D0C79B-3C87-4C97-8456-3ACA0AF5688F}" type="datetimeFigureOut">
+            <a:fld id="{FABA0CEF-6B6F-4C75-A92D-568F72159570}" type="datetimeFigureOut">
               <a:rPr kumimoji="1" lang="ja-JP" altLang="en-US" smtClean="0"/>
               <a:t>2026/7/30</a:t>
             </a:fld>
@@ -1245,7 +1245,7 @@
           <p:cNvPr id="5" name="フッター プレースホルダー 4">
             <a:extLst>
               <a:ext uri="{FF2B5EF4-FFF2-40B4-BE49-F238E27FC236}">
-                <a16:creationId xmlns:a16="http://schemas.microsoft.com/office/drawing/2014/main" id="{4CBC6955-4706-DDB7-D0C5-15B94C1B6BA1}"/>
+                <a16:creationId xmlns:a16="http://schemas.microsoft.com/office/drawing/2014/main" id="{46B044A0-3ED3-5136-3281-018E18F93F17}"/>
               </a:ext>
             </a:extLst>
           </p:cNvPr>
@@ -1270,7 +1270,7 @@
           <p:cNvPr id="6" name="スライド番号プレースホルダー 5">
             <a:extLst>
               <a:ext uri="{FF2B5EF4-FFF2-40B4-BE49-F238E27FC236}">
-                <a16:creationId xmlns:a16="http://schemas.microsoft.com/office/drawing/2014/main" id="{A189FF8A-9C23-8A4D-DFA1-AD1BB846D564}"/>
+                <a16:creationId xmlns:a16="http://schemas.microsoft.com/office/drawing/2014/main" id="{0997C85C-1441-2BB7-079A-3063FAB1A01F}"/>
               </a:ext>
             </a:extLst>
           </p:cNvPr>
@@ -1286,7 +1286,7 @@
           <a:bodyPr/>
           <a:lstStyle/>
           <a:p>
-            <a:fld id="{58FD96F2-E146-432C-99C1-E05DA8086B69}" type="slidenum">
+            <a:fld id="{DCD6F61F-B9FE-4C34-94D9-5BC0C4D05291}" type="slidenum">
               <a:rPr kumimoji="1" lang="ja-JP" altLang="en-US" smtClean="0"/>
               <a:t>‹#›</a:t>
             </a:fld>
@@ -1297,7 +1297,7 @@
     </p:spTree>
     <p:extLst>
       <p:ext uri="{BB962C8B-B14F-4D97-AF65-F5344CB8AC3E}">
-        <p14:creationId xmlns:p14="http://schemas.microsoft.com/office/powerpoint/2010/main" val="4288064793"/>
+        <p14:creationId xmlns:p14="http://schemas.microsoft.com/office/powerpoint/2010/main" val="3815727922"/>
       </p:ext>
     </p:extLst>
   </p:cSld>
@@ -1329,7 +1329,7 @@
           <p:cNvPr id="2" name="タイトル 1">
             <a:extLst>
               <a:ext uri="{FF2B5EF4-FFF2-40B4-BE49-F238E27FC236}">
-                <a16:creationId xmlns:a16="http://schemas.microsoft.com/office/drawing/2014/main" id="{CE0DCF25-7AD2-9CA7-BCA4-770B4D81CADC}"/>
+                <a16:creationId xmlns:a16="http://schemas.microsoft.com/office/drawing/2014/main" id="{59170F3A-36BB-197E-06F3-6C4453B51643}"/>
               </a:ext>
             </a:extLst>
           </p:cNvPr>
@@ -1357,7 +1357,7 @@
           <p:cNvPr id="3" name="コンテンツ プレースホルダー 2">
             <a:extLst>
               <a:ext uri="{FF2B5EF4-FFF2-40B4-BE49-F238E27FC236}">
-                <a16:creationId xmlns:a16="http://schemas.microsoft.com/office/drawing/2014/main" id="{DC084BF6-4955-C900-2AF8-27E53E8BAD2E}"/>
+                <a16:creationId xmlns:a16="http://schemas.microsoft.com/office/drawing/2014/main" id="{7C08E564-6790-6AFD-9384-6ADB01352FD9}"/>
               </a:ext>
             </a:extLst>
           </p:cNvPr>
@@ -1451,7 +1451,7 @@
           <p:cNvPr id="4" name="コンテンツ プレースホルダー 3">
             <a:extLst>
               <a:ext uri="{FF2B5EF4-FFF2-40B4-BE49-F238E27FC236}">
-                <a16:creationId xmlns:a16="http://schemas.microsoft.com/office/drawing/2014/main" id="{379D40B4-55F7-023E-55C2-78CD9D3C8A3C}"/>
+                <a16:creationId xmlns:a16="http://schemas.microsoft.com/office/drawing/2014/main" id="{E7059ABA-9E8B-8565-6341-603FD0E2115D}"/>
               </a:ext>
             </a:extLst>
           </p:cNvPr>
@@ -1545,7 +1545,7 @@
           <p:cNvPr id="5" name="日付プレースホルダー 4">
             <a:extLst>
               <a:ext uri="{FF2B5EF4-FFF2-40B4-BE49-F238E27FC236}">
-                <a16:creationId xmlns:a16="http://schemas.microsoft.com/office/drawing/2014/main" id="{C3CB6D01-65B6-C455-794E-A1FE081B9B2E}"/>
+                <a16:creationId xmlns:a16="http://schemas.microsoft.com/office/drawing/2014/main" id="{7825EE23-426C-86ED-8B78-41ED3EFD908C}"/>
               </a:ext>
             </a:extLst>
           </p:cNvPr>
@@ -1561,7 +1561,7 @@
           <a:bodyPr/>
           <a:lstStyle/>
           <a:p>
-            <a:fld id="{60D0C79B-3C87-4C97-8456-3ACA0AF5688F}" type="datetimeFigureOut">
+            <a:fld id="{FABA0CEF-6B6F-4C75-A92D-568F72159570}" type="datetimeFigureOut">
               <a:rPr kumimoji="1" lang="ja-JP" altLang="en-US" smtClean="0"/>
               <a:t>2026/7/30</a:t>
             </a:fld>
@@ -1574,7 +1574,7 @@
           <p:cNvPr id="6" name="フッター プレースホルダー 5">
             <a:extLst>
               <a:ext uri="{FF2B5EF4-FFF2-40B4-BE49-F238E27FC236}">
-                <a16:creationId xmlns:a16="http://schemas.microsoft.com/office/drawing/2014/main" id="{62A35D0C-C1AC-6C43-3ECE-C4ED28076E8F}"/>
+                <a16:creationId xmlns:a16="http://schemas.microsoft.com/office/drawing/2014/main" id="{7A1F2FCB-F960-C95C-3CAB-DBF047E3112C}"/>
               </a:ext>
             </a:extLst>
           </p:cNvPr>
@@ -1599,7 +1599,7 @@
           <p:cNvPr id="7" name="スライド番号プレースホルダー 6">
             <a:extLst>
               <a:ext uri="{FF2B5EF4-FFF2-40B4-BE49-F238E27FC236}">
-                <a16:creationId xmlns:a16="http://schemas.microsoft.com/office/drawing/2014/main" id="{44CFD309-A215-0162-D98F-6EED1290B8DA}"/>
+                <a16:creationId xmlns:a16="http://schemas.microsoft.com/office/drawing/2014/main" id="{4621F400-E3BB-5017-D453-57E8626089A0}"/>
               </a:ext>
             </a:extLst>
           </p:cNvPr>
@@ -1615,7 +1615,7 @@
           <a:bodyPr/>
           <a:lstStyle/>
           <a:p>
-            <a:fld id="{58FD96F2-E146-432C-99C1-E05DA8086B69}" type="slidenum">
+            <a:fld id="{DCD6F61F-B9FE-4C34-94D9-5BC0C4D05291}" type="slidenum">
               <a:rPr kumimoji="1" lang="ja-JP" altLang="en-US" smtClean="0"/>
               <a:t>‹#›</a:t>
             </a:fld>
@@ -1626,7 +1626,7 @@
     </p:spTree>
     <p:extLst>
       <p:ext uri="{BB962C8B-B14F-4D97-AF65-F5344CB8AC3E}">
-        <p14:creationId xmlns:p14="http://schemas.microsoft.com/office/powerpoint/2010/main" val="2862694904"/>
+        <p14:creationId xmlns:p14="http://schemas.microsoft.com/office/powerpoint/2010/main" val="1964320079"/>
       </p:ext>
     </p:extLst>
   </p:cSld>
@@ -1658,7 +1658,7 @@
           <p:cNvPr id="2" name="タイトル 1">
             <a:extLst>
               <a:ext uri="{FF2B5EF4-FFF2-40B4-BE49-F238E27FC236}">
-                <a16:creationId xmlns:a16="http://schemas.microsoft.com/office/drawing/2014/main" id="{EF9C02C2-4265-9ADD-B82F-B7C684D7EAB8}"/>
+                <a16:creationId xmlns:a16="http://schemas.microsoft.com/office/drawing/2014/main" id="{88C8AFCD-B009-5B05-49A8-31E7A6579F13}"/>
               </a:ext>
             </a:extLst>
           </p:cNvPr>
@@ -1691,7 +1691,7 @@
           <p:cNvPr id="3" name="テキスト プレースホルダー 2">
             <a:extLst>
               <a:ext uri="{FF2B5EF4-FFF2-40B4-BE49-F238E27FC236}">
-                <a16:creationId xmlns:a16="http://schemas.microsoft.com/office/drawing/2014/main" id="{1E5486EC-B86A-305B-7509-8C8F3AADDC9E}"/>
+                <a16:creationId xmlns:a16="http://schemas.microsoft.com/office/drawing/2014/main" id="{E72B9EB2-E68D-12D3-E3A3-4E03ADCE8A7E}"/>
               </a:ext>
             </a:extLst>
           </p:cNvPr>
@@ -1762,7 +1762,7 @@
           <p:cNvPr id="4" name="コンテンツ プレースホルダー 3">
             <a:extLst>
               <a:ext uri="{FF2B5EF4-FFF2-40B4-BE49-F238E27FC236}">
-                <a16:creationId xmlns:a16="http://schemas.microsoft.com/office/drawing/2014/main" id="{FE44A308-8F52-F504-8E2C-B48A045F4A9D}"/>
+                <a16:creationId xmlns:a16="http://schemas.microsoft.com/office/drawing/2014/main" id="{4500473D-EB64-D81E-4BB6-E4E0A7DF2241}"/>
               </a:ext>
             </a:extLst>
           </p:cNvPr>
@@ -1856,7 +1856,7 @@
           <p:cNvPr id="5" name="テキスト プレースホルダー 4">
             <a:extLst>
               <a:ext uri="{FF2B5EF4-FFF2-40B4-BE49-F238E27FC236}">
-                <a16:creationId xmlns:a16="http://schemas.microsoft.com/office/drawing/2014/main" id="{E85A2747-BF4E-72E7-C547-03F9F1C50659}"/>
+                <a16:creationId xmlns:a16="http://schemas.microsoft.com/office/drawing/2014/main" id="{8868F709-2928-64EE-0A04-C35A1BBED167}"/>
               </a:ext>
             </a:extLst>
           </p:cNvPr>
@@ -1927,7 +1927,7 @@
           <p:cNvPr id="6" name="コンテンツ プレースホルダー 5">
             <a:extLst>
               <a:ext uri="{FF2B5EF4-FFF2-40B4-BE49-F238E27FC236}">
-                <a16:creationId xmlns:a16="http://schemas.microsoft.com/office/drawing/2014/main" id="{B7DF96CE-5A0D-2C03-5962-6CE1195DA61A}"/>
+                <a16:creationId xmlns:a16="http://schemas.microsoft.com/office/drawing/2014/main" id="{43E80FC8-E751-D048-989B-294744D4F4D8}"/>
               </a:ext>
             </a:extLst>
           </p:cNvPr>
@@ -2021,7 +2021,7 @@
           <p:cNvPr id="7" name="日付プレースホルダー 6">
             <a:extLst>
               <a:ext uri="{FF2B5EF4-FFF2-40B4-BE49-F238E27FC236}">
-                <a16:creationId xmlns:a16="http://schemas.microsoft.com/office/drawing/2014/main" id="{0E8DCFB6-56E8-1113-5A2C-015541D6E078}"/>
+                <a16:creationId xmlns:a16="http://schemas.microsoft.com/office/drawing/2014/main" id="{D824F1A1-4466-68F7-F82C-1DD6027DABC5}"/>
               </a:ext>
             </a:extLst>
           </p:cNvPr>
@@ -2037,7 +2037,7 @@
           <a:bodyPr/>
           <a:lstStyle/>
           <a:p>
-            <a:fld id="{60D0C79B-3C87-4C97-8456-3ACA0AF5688F}" type="datetimeFigureOut">
+            <a:fld id="{FABA0CEF-6B6F-4C75-A92D-568F72159570}" type="datetimeFigureOut">
               <a:rPr kumimoji="1" lang="ja-JP" altLang="en-US" smtClean="0"/>
               <a:t>2026/7/30</a:t>
             </a:fld>
@@ -2050,7 +2050,7 @@
           <p:cNvPr id="8" name="フッター プレースホルダー 7">
             <a:extLst>
               <a:ext uri="{FF2B5EF4-FFF2-40B4-BE49-F238E27FC236}">
-                <a16:creationId xmlns:a16="http://schemas.microsoft.com/office/drawing/2014/main" id="{89298163-6CA3-0651-0D8D-D10E49E155C7}"/>
+                <a16:creationId xmlns:a16="http://schemas.microsoft.com/office/drawing/2014/main" id="{E45744D8-258C-3368-F1D7-1057AC2C5F97}"/>
               </a:ext>
             </a:extLst>
           </p:cNvPr>
@@ -2075,7 +2075,7 @@
           <p:cNvPr id="9" name="スライド番号プレースホルダー 8">
             <a:extLst>
               <a:ext uri="{FF2B5EF4-FFF2-40B4-BE49-F238E27FC236}">
-                <a16:creationId xmlns:a16="http://schemas.microsoft.com/office/drawing/2014/main" id="{B9A14948-5DCB-42CC-3964-CFE130BA294B}"/>
+                <a16:creationId xmlns:a16="http://schemas.microsoft.com/office/drawing/2014/main" id="{2B2FE28B-7DB8-4E84-1D69-E2C7DAF39A16}"/>
               </a:ext>
             </a:extLst>
           </p:cNvPr>
@@ -2091,7 +2091,7 @@
           <a:bodyPr/>
           <a:lstStyle/>
           <a:p>
-            <a:fld id="{58FD96F2-E146-432C-99C1-E05DA8086B69}" type="slidenum">
+            <a:fld id="{DCD6F61F-B9FE-4C34-94D9-5BC0C4D05291}" type="slidenum">
               <a:rPr kumimoji="1" lang="ja-JP" altLang="en-US" smtClean="0"/>
               <a:t>‹#›</a:t>
             </a:fld>
@@ -2102,7 +2102,7 @@
     </p:spTree>
     <p:extLst>
       <p:ext uri="{BB962C8B-B14F-4D97-AF65-F5344CB8AC3E}">
-        <p14:creationId xmlns:p14="http://schemas.microsoft.com/office/powerpoint/2010/main" val="2027328853"/>
+        <p14:creationId xmlns:p14="http://schemas.microsoft.com/office/powerpoint/2010/main" val="2910668450"/>
       </p:ext>
     </p:extLst>
   </p:cSld>
@@ -2134,7 +2134,7 @@
           <p:cNvPr id="2" name="タイトル 1">
             <a:extLst>
               <a:ext uri="{FF2B5EF4-FFF2-40B4-BE49-F238E27FC236}">
-                <a16:creationId xmlns:a16="http://schemas.microsoft.com/office/drawing/2014/main" id="{7105A528-EF70-494E-1C09-6310381DCF16}"/>
+                <a16:creationId xmlns:a16="http://schemas.microsoft.com/office/drawing/2014/main" id="{27708FE0-B53E-4DF6-A244-E2A69D52E307}"/>
               </a:ext>
             </a:extLst>
           </p:cNvPr>
@@ -2162,7 +2162,7 @@
           <p:cNvPr id="3" name="日付プレースホルダー 2">
             <a:extLst>
               <a:ext uri="{FF2B5EF4-FFF2-40B4-BE49-F238E27FC236}">
-                <a16:creationId xmlns:a16="http://schemas.microsoft.com/office/drawing/2014/main" id="{303CC7CC-083A-4207-E241-B59CCFBCF72D}"/>
+                <a16:creationId xmlns:a16="http://schemas.microsoft.com/office/drawing/2014/main" id="{62DE4247-A012-7B52-FFF6-FCA4A439CE06}"/>
               </a:ext>
             </a:extLst>
           </p:cNvPr>
@@ -2178,7 +2178,7 @@
           <a:bodyPr/>
           <a:lstStyle/>
           <a:p>
-            <a:fld id="{60D0C79B-3C87-4C97-8456-3ACA0AF5688F}" type="datetimeFigureOut">
+            <a:fld id="{FABA0CEF-6B6F-4C75-A92D-568F72159570}" type="datetimeFigureOut">
               <a:rPr kumimoji="1" lang="ja-JP" altLang="en-US" smtClean="0"/>
               <a:t>2026/7/30</a:t>
             </a:fld>
@@ -2191,7 +2191,7 @@
           <p:cNvPr id="4" name="フッター プレースホルダー 3">
             <a:extLst>
               <a:ext uri="{FF2B5EF4-FFF2-40B4-BE49-F238E27FC236}">
-                <a16:creationId xmlns:a16="http://schemas.microsoft.com/office/drawing/2014/main" id="{AC30995B-6059-B1B6-2E22-E666C84BD2F1}"/>
+                <a16:creationId xmlns:a16="http://schemas.microsoft.com/office/drawing/2014/main" id="{CA255DA2-71E0-47F2-6D91-CCFF31140F77}"/>
               </a:ext>
             </a:extLst>
           </p:cNvPr>
@@ -2216,7 +2216,7 @@
           <p:cNvPr id="5" name="スライド番号プレースホルダー 4">
             <a:extLst>
               <a:ext uri="{FF2B5EF4-FFF2-40B4-BE49-F238E27FC236}">
-                <a16:creationId xmlns:a16="http://schemas.microsoft.com/office/drawing/2014/main" id="{6CED0356-7213-A39E-8CC9-94229863B0C7}"/>
+                <a16:creationId xmlns:a16="http://schemas.microsoft.com/office/drawing/2014/main" id="{9B69D10A-9825-E764-C2D3-9D00333BA3E4}"/>
               </a:ext>
             </a:extLst>
           </p:cNvPr>
@@ -2232,7 +2232,7 @@
           <a:bodyPr/>
           <a:lstStyle/>
           <a:p>
-            <a:fld id="{58FD96F2-E146-432C-99C1-E05DA8086B69}" type="slidenum">
+            <a:fld id="{DCD6F61F-B9FE-4C34-94D9-5BC0C4D05291}" type="slidenum">
               <a:rPr kumimoji="1" lang="ja-JP" altLang="en-US" smtClean="0"/>
               <a:t>‹#›</a:t>
             </a:fld>
@@ -2243,7 +2243,7 @@
     </p:spTree>
     <p:extLst>
       <p:ext uri="{BB962C8B-B14F-4D97-AF65-F5344CB8AC3E}">
-        <p14:creationId xmlns:p14="http://schemas.microsoft.com/office/powerpoint/2010/main" val="3226037953"/>
+        <p14:creationId xmlns:p14="http://schemas.microsoft.com/office/powerpoint/2010/main" val="1595425207"/>
       </p:ext>
     </p:extLst>
   </p:cSld>
@@ -2275,7 +2275,7 @@
           <p:cNvPr id="2" name="日付プレースホルダー 1">
             <a:extLst>
               <a:ext uri="{FF2B5EF4-FFF2-40B4-BE49-F238E27FC236}">
-                <a16:creationId xmlns:a16="http://schemas.microsoft.com/office/drawing/2014/main" id="{53895D43-D7E9-6D34-57E6-C3040094E144}"/>
+                <a16:creationId xmlns:a16="http://schemas.microsoft.com/office/drawing/2014/main" id="{EA35742E-548E-12E2-B67C-EAA0A8AA95D7}"/>
               </a:ext>
             </a:extLst>
           </p:cNvPr>
@@ -2291,7 +2291,7 @@
           <a:bodyPr/>
           <a:lstStyle/>
           <a:p>
-            <a:fld id="{60D0C79B-3C87-4C97-8456-3ACA0AF5688F}" type="datetimeFigureOut">
+            <a:fld id="{FABA0CEF-6B6F-4C75-A92D-568F72159570}" type="datetimeFigureOut">
               <a:rPr kumimoji="1" lang="ja-JP" altLang="en-US" smtClean="0"/>
               <a:t>2026/7/30</a:t>
             </a:fld>
@@ -2304,7 +2304,7 @@
           <p:cNvPr id="3" name="フッター プレースホルダー 2">
             <a:extLst>
               <a:ext uri="{FF2B5EF4-FFF2-40B4-BE49-F238E27FC236}">
-                <a16:creationId xmlns:a16="http://schemas.microsoft.com/office/drawing/2014/main" id="{50689E0B-CB43-41F5-A6C5-AEE32893AEDC}"/>
+                <a16:creationId xmlns:a16="http://schemas.microsoft.com/office/drawing/2014/main" id="{AE840067-CD62-6A1A-7FD3-F7B82A07F882}"/>
               </a:ext>
             </a:extLst>
           </p:cNvPr>
@@ -2329,7 +2329,7 @@
           <p:cNvPr id="4" name="スライド番号プレースホルダー 3">
             <a:extLst>
               <a:ext uri="{FF2B5EF4-FFF2-40B4-BE49-F238E27FC236}">
-                <a16:creationId xmlns:a16="http://schemas.microsoft.com/office/drawing/2014/main" id="{8925CFAD-4EC2-ED0E-8BCA-351C65763458}"/>
+                <a16:creationId xmlns:a16="http://schemas.microsoft.com/office/drawing/2014/main" id="{0AB6B77C-3443-DEA1-9B14-0C1A76624E6C}"/>
               </a:ext>
             </a:extLst>
           </p:cNvPr>
@@ -2345,7 +2345,7 @@
           <a:bodyPr/>
           <a:lstStyle/>
           <a:p>
-            <a:fld id="{58FD96F2-E146-432C-99C1-E05DA8086B69}" type="slidenum">
+            <a:fld id="{DCD6F61F-B9FE-4C34-94D9-5BC0C4D05291}" type="slidenum">
               <a:rPr kumimoji="1" lang="ja-JP" altLang="en-US" smtClean="0"/>
               <a:t>‹#›</a:t>
             </a:fld>
@@ -2356,7 +2356,7 @@
     </p:spTree>
     <p:extLst>
       <p:ext uri="{BB962C8B-B14F-4D97-AF65-F5344CB8AC3E}">
-        <p14:creationId xmlns:p14="http://schemas.microsoft.com/office/powerpoint/2010/main" val="424089550"/>
+        <p14:creationId xmlns:p14="http://schemas.microsoft.com/office/powerpoint/2010/main" val="715576218"/>
       </p:ext>
     </p:extLst>
   </p:cSld>
@@ -2388,7 +2388,7 @@
           <p:cNvPr id="2" name="タイトル 1">
             <a:extLst>
               <a:ext uri="{FF2B5EF4-FFF2-40B4-BE49-F238E27FC236}">
-                <a16:creationId xmlns:a16="http://schemas.microsoft.com/office/drawing/2014/main" id="{58F7E674-872E-545C-0C99-280C924CF38D}"/>
+                <a16:creationId xmlns:a16="http://schemas.microsoft.com/office/drawing/2014/main" id="{B8BB9BEA-BCF8-9B9D-EAA4-873596F21C1C}"/>
               </a:ext>
             </a:extLst>
           </p:cNvPr>
@@ -2425,7 +2425,7 @@
           <p:cNvPr id="3" name="コンテンツ プレースホルダー 2">
             <a:extLst>
               <a:ext uri="{FF2B5EF4-FFF2-40B4-BE49-F238E27FC236}">
-                <a16:creationId xmlns:a16="http://schemas.microsoft.com/office/drawing/2014/main" id="{0E171EB9-C59C-903D-E0BB-5864B3DF8263}"/>
+                <a16:creationId xmlns:a16="http://schemas.microsoft.com/office/drawing/2014/main" id="{0CA16A0B-8B70-83A1-228E-96CAFC54569F}"/>
               </a:ext>
             </a:extLst>
           </p:cNvPr>
@@ -2547,7 +2547,7 @@
           <p:cNvPr id="4" name="テキスト プレースホルダー 3">
             <a:extLst>
               <a:ext uri="{FF2B5EF4-FFF2-40B4-BE49-F238E27FC236}">
-                <a16:creationId xmlns:a16="http://schemas.microsoft.com/office/drawing/2014/main" id="{4713CF51-6182-AB1C-FBBE-9232938BBE68}"/>
+                <a16:creationId xmlns:a16="http://schemas.microsoft.com/office/drawing/2014/main" id="{7873F7DA-8900-528F-9225-BA8D2823B71F}"/>
               </a:ext>
             </a:extLst>
           </p:cNvPr>
@@ -2618,7 +2618,7 @@
           <p:cNvPr id="5" name="日付プレースホルダー 4">
             <a:extLst>
               <a:ext uri="{FF2B5EF4-FFF2-40B4-BE49-F238E27FC236}">
-                <a16:creationId xmlns:a16="http://schemas.microsoft.com/office/drawing/2014/main" id="{F6BA9CF1-92AA-4EC0-0AD8-04C89BA1F186}"/>
+                <a16:creationId xmlns:a16="http://schemas.microsoft.com/office/drawing/2014/main" id="{A1626764-8072-87C6-A3BB-B8427FA8FE55}"/>
               </a:ext>
             </a:extLst>
           </p:cNvPr>
@@ -2634,7 +2634,7 @@
           <a:bodyPr/>
           <a:lstStyle/>
           <a:p>
-            <a:fld id="{60D0C79B-3C87-4C97-8456-3ACA0AF5688F}" type="datetimeFigureOut">
+            <a:fld id="{FABA0CEF-6B6F-4C75-A92D-568F72159570}" type="datetimeFigureOut">
               <a:rPr kumimoji="1" lang="ja-JP" altLang="en-US" smtClean="0"/>
               <a:t>2026/7/30</a:t>
             </a:fld>
@@ -2647,7 +2647,7 @@
           <p:cNvPr id="6" name="フッター プレースホルダー 5">
             <a:extLst>
               <a:ext uri="{FF2B5EF4-FFF2-40B4-BE49-F238E27FC236}">
-                <a16:creationId xmlns:a16="http://schemas.microsoft.com/office/drawing/2014/main" id="{83C297BD-1A77-CD90-5545-4DA4DE648C3E}"/>
+                <a16:creationId xmlns:a16="http://schemas.microsoft.com/office/drawing/2014/main" id="{36D31ECA-7E30-D5AE-E0EB-C2D409855C1A}"/>
               </a:ext>
             </a:extLst>
           </p:cNvPr>
@@ -2672,7 +2672,7 @@
           <p:cNvPr id="7" name="スライド番号プレースホルダー 6">
             <a:extLst>
               <a:ext uri="{FF2B5EF4-FFF2-40B4-BE49-F238E27FC236}">
-                <a16:creationId xmlns:a16="http://schemas.microsoft.com/office/drawing/2014/main" id="{9E1EE08B-1419-31A5-A0FE-B896560143B3}"/>
+                <a16:creationId xmlns:a16="http://schemas.microsoft.com/office/drawing/2014/main" id="{5765862E-64A5-D553-DF84-6A59737B09D3}"/>
               </a:ext>
             </a:extLst>
           </p:cNvPr>
@@ -2688,7 +2688,7 @@
           <a:bodyPr/>
           <a:lstStyle/>
           <a:p>
-            <a:fld id="{58FD96F2-E146-432C-99C1-E05DA8086B69}" type="slidenum">
+            <a:fld id="{DCD6F61F-B9FE-4C34-94D9-5BC0C4D05291}" type="slidenum">
               <a:rPr kumimoji="1" lang="ja-JP" altLang="en-US" smtClean="0"/>
               <a:t>‹#›</a:t>
             </a:fld>
@@ -2699,7 +2699,7 @@
     </p:spTree>
     <p:extLst>
       <p:ext uri="{BB962C8B-B14F-4D97-AF65-F5344CB8AC3E}">
-        <p14:creationId xmlns:p14="http://schemas.microsoft.com/office/powerpoint/2010/main" val="675308482"/>
+        <p14:creationId xmlns:p14="http://schemas.microsoft.com/office/powerpoint/2010/main" val="3387524559"/>
       </p:ext>
     </p:extLst>
   </p:cSld>
@@ -2731,7 +2731,7 @@
           <p:cNvPr id="2" name="タイトル 1">
             <a:extLst>
               <a:ext uri="{FF2B5EF4-FFF2-40B4-BE49-F238E27FC236}">
-                <a16:creationId xmlns:a16="http://schemas.microsoft.com/office/drawing/2014/main" id="{57761F34-7AA2-21DD-980B-30224A1F26DD}"/>
+                <a16:creationId xmlns:a16="http://schemas.microsoft.com/office/drawing/2014/main" id="{D9B0A1D4-F639-D002-7CE2-7FAFB53D7462}"/>
               </a:ext>
             </a:extLst>
           </p:cNvPr>
@@ -2768,7 +2768,7 @@
           <p:cNvPr id="3" name="図プレースホルダー 2">
             <a:extLst>
               <a:ext uri="{FF2B5EF4-FFF2-40B4-BE49-F238E27FC236}">
-                <a16:creationId xmlns:a16="http://schemas.microsoft.com/office/drawing/2014/main" id="{55B24748-3BF6-92BE-CA14-E68539F4784B}"/>
+                <a16:creationId xmlns:a16="http://schemas.microsoft.com/office/drawing/2014/main" id="{3A33A445-7D06-C3C5-6AE0-46C44FC00ABA}"/>
               </a:ext>
             </a:extLst>
           </p:cNvPr>
@@ -2835,7 +2835,7 @@
           <p:cNvPr id="4" name="テキスト プレースホルダー 3">
             <a:extLst>
               <a:ext uri="{FF2B5EF4-FFF2-40B4-BE49-F238E27FC236}">
-                <a16:creationId xmlns:a16="http://schemas.microsoft.com/office/drawing/2014/main" id="{DC071C4B-325B-11D0-8EBF-72131CD92A96}"/>
+                <a16:creationId xmlns:a16="http://schemas.microsoft.com/office/drawing/2014/main" id="{DF8F4822-74BA-29B5-1358-FDB2BFFC08D9}"/>
               </a:ext>
             </a:extLst>
           </p:cNvPr>
@@ -2906,7 +2906,7 @@
           <p:cNvPr id="5" name="日付プレースホルダー 4">
             <a:extLst>
               <a:ext uri="{FF2B5EF4-FFF2-40B4-BE49-F238E27FC236}">
-                <a16:creationId xmlns:a16="http://schemas.microsoft.com/office/drawing/2014/main" id="{D80E79A3-CE0E-879E-0278-3D27FAF59CFC}"/>
+                <a16:creationId xmlns:a16="http://schemas.microsoft.com/office/drawing/2014/main" id="{71C5AC12-5EDE-81BA-8509-9B191DB9B958}"/>
               </a:ext>
             </a:extLst>
           </p:cNvPr>
@@ -2922,7 +2922,7 @@
           <a:bodyPr/>
           <a:lstStyle/>
           <a:p>
-            <a:fld id="{60D0C79B-3C87-4C97-8456-3ACA0AF5688F}" type="datetimeFigureOut">
+            <a:fld id="{FABA0CEF-6B6F-4C75-A92D-568F72159570}" type="datetimeFigureOut">
               <a:rPr kumimoji="1" lang="ja-JP" altLang="en-US" smtClean="0"/>
               <a:t>2026/7/30</a:t>
             </a:fld>
@@ -2935,7 +2935,7 @@
           <p:cNvPr id="6" name="フッター プレースホルダー 5">
             <a:extLst>
               <a:ext uri="{FF2B5EF4-FFF2-40B4-BE49-F238E27FC236}">
-                <a16:creationId xmlns:a16="http://schemas.microsoft.com/office/drawing/2014/main" id="{3FDD7969-68C9-19D1-7568-A3C31D3BFC3B}"/>
+                <a16:creationId xmlns:a16="http://schemas.microsoft.com/office/drawing/2014/main" id="{59607C45-D619-FC58-7E56-CA3666588B52}"/>
               </a:ext>
             </a:extLst>
           </p:cNvPr>
@@ -2960,7 +2960,7 @@
           <p:cNvPr id="7" name="スライド番号プレースホルダー 6">
             <a:extLst>
               <a:ext uri="{FF2B5EF4-FFF2-40B4-BE49-F238E27FC236}">
-                <a16:creationId xmlns:a16="http://schemas.microsoft.com/office/drawing/2014/main" id="{C9BF1275-FA34-825E-6AEB-26379A7A9178}"/>
+                <a16:creationId xmlns:a16="http://schemas.microsoft.com/office/drawing/2014/main" id="{05EAF7E9-0BFB-A24C-669F-42876C68765B}"/>
               </a:ext>
             </a:extLst>
           </p:cNvPr>
@@ -2976,7 +2976,7 @@
           <a:bodyPr/>
           <a:lstStyle/>
           <a:p>
-            <a:fld id="{58FD96F2-E146-432C-99C1-E05DA8086B69}" type="slidenum">
+            <a:fld id="{DCD6F61F-B9FE-4C34-94D9-5BC0C4D05291}" type="slidenum">
               <a:rPr kumimoji="1" lang="ja-JP" altLang="en-US" smtClean="0"/>
               <a:t>‹#›</a:t>
             </a:fld>
@@ -2987,7 +2987,7 @@
     </p:spTree>
     <p:extLst>
       <p:ext uri="{BB962C8B-B14F-4D97-AF65-F5344CB8AC3E}">
-        <p14:creationId xmlns:p14="http://schemas.microsoft.com/office/powerpoint/2010/main" val="518480257"/>
+        <p14:creationId xmlns:p14="http://schemas.microsoft.com/office/powerpoint/2010/main" val="4149602548"/>
       </p:ext>
     </p:extLst>
   </p:cSld>
@@ -3024,7 +3024,7 @@
           <p:cNvPr id="2" name="タイトル プレースホルダー 1">
             <a:extLst>
               <a:ext uri="{FF2B5EF4-FFF2-40B4-BE49-F238E27FC236}">
-                <a16:creationId xmlns:a16="http://schemas.microsoft.com/office/drawing/2014/main" id="{F776B2D5-7C45-689E-6056-7A65F727452E}"/>
+                <a16:creationId xmlns:a16="http://schemas.microsoft.com/office/drawing/2014/main" id="{561DF083-FC7A-E5CE-1938-3313A76D7A55}"/>
               </a:ext>
             </a:extLst>
           </p:cNvPr>
@@ -3062,7 +3062,7 @@
           <p:cNvPr id="3" name="テキスト プレースホルダー 2">
             <a:extLst>
               <a:ext uri="{FF2B5EF4-FFF2-40B4-BE49-F238E27FC236}">
-                <a16:creationId xmlns:a16="http://schemas.microsoft.com/office/drawing/2014/main" id="{15FA32A8-E347-E2B3-44F6-15AC7B24C6C8}"/>
+                <a16:creationId xmlns:a16="http://schemas.microsoft.com/office/drawing/2014/main" id="{872E4F3B-EFD8-087B-7B46-6897077357B3}"/>
               </a:ext>
             </a:extLst>
           </p:cNvPr>
@@ -3161,7 +3161,7 @@
           <p:cNvPr id="4" name="日付プレースホルダー 3">
             <a:extLst>
               <a:ext uri="{FF2B5EF4-FFF2-40B4-BE49-F238E27FC236}">
-                <a16:creationId xmlns:a16="http://schemas.microsoft.com/office/drawing/2014/main" id="{4D3E8B9B-34B0-D289-DE2E-6F782103C0D9}"/>
+                <a16:creationId xmlns:a16="http://schemas.microsoft.com/office/drawing/2014/main" id="{C1C51284-63EA-914D-E45D-8437F09CBA4B}"/>
               </a:ext>
             </a:extLst>
           </p:cNvPr>
@@ -3195,7 +3195,7 @@
             </a:lvl1pPr>
           </a:lstStyle>
           <a:p>
-            <a:fld id="{60D0C79B-3C87-4C97-8456-3ACA0AF5688F}" type="datetimeFigureOut">
+            <a:fld id="{FABA0CEF-6B6F-4C75-A92D-568F72159570}" type="datetimeFigureOut">
               <a:rPr kumimoji="1" lang="ja-JP" altLang="en-US" smtClean="0"/>
               <a:t>2026/7/30</a:t>
             </a:fld>
@@ -3208,7 +3208,7 @@
           <p:cNvPr id="5" name="フッター プレースホルダー 4">
             <a:extLst>
               <a:ext uri="{FF2B5EF4-FFF2-40B4-BE49-F238E27FC236}">
-                <a16:creationId xmlns:a16="http://schemas.microsoft.com/office/drawing/2014/main" id="{5F48294A-950B-01C3-1183-82288E7D09CA}"/>
+                <a16:creationId xmlns:a16="http://schemas.microsoft.com/office/drawing/2014/main" id="{03ACF320-215A-A89B-C14F-431C1F5F2013}"/>
               </a:ext>
             </a:extLst>
           </p:cNvPr>
@@ -3251,7 +3251,7 @@
           <p:cNvPr id="6" name="スライド番号プレースホルダー 5">
             <a:extLst>
               <a:ext uri="{FF2B5EF4-FFF2-40B4-BE49-F238E27FC236}">
-                <a16:creationId xmlns:a16="http://schemas.microsoft.com/office/drawing/2014/main" id="{7C1806FB-D170-720F-21A6-8562729C8418}"/>
+                <a16:creationId xmlns:a16="http://schemas.microsoft.com/office/drawing/2014/main" id="{1F326AAD-0CD0-47BE-DFF7-21F9419BF6F0}"/>
               </a:ext>
             </a:extLst>
           </p:cNvPr>
@@ -3285,7 +3285,7 @@
             </a:lvl1pPr>
           </a:lstStyle>
           <a:p>
-            <a:fld id="{58FD96F2-E146-432C-99C1-E05DA8086B69}" type="slidenum">
+            <a:fld id="{DCD6F61F-B9FE-4C34-94D9-5BC0C4D05291}" type="slidenum">
               <a:rPr kumimoji="1" lang="ja-JP" altLang="en-US" smtClean="0"/>
               <a:t>‹#›</a:t>
             </a:fld>
@@ -3296,7 +3296,7 @@
     </p:spTree>
     <p:extLst>
       <p:ext uri="{BB962C8B-B14F-4D97-AF65-F5344CB8AC3E}">
-        <p14:creationId xmlns:p14="http://schemas.microsoft.com/office/powerpoint/2010/main" val="1401766991"/>
+        <p14:creationId xmlns:p14="http://schemas.microsoft.com/office/powerpoint/2010/main" val="1115443502"/>
       </p:ext>
     </p:extLst>
   </p:cSld>
@@ -3619,7 +3619,7 @@
           <p:cNvPr id="2" name="テキスト ボックス 1">
             <a:extLst>
               <a:ext uri="{FF2B5EF4-FFF2-40B4-BE49-F238E27FC236}">
-                <a16:creationId xmlns:a16="http://schemas.microsoft.com/office/drawing/2014/main" id="{1D04C037-E634-E34A-CE18-85251386C4E1}"/>
+                <a16:creationId xmlns:a16="http://schemas.microsoft.com/office/drawing/2014/main" id="{832ECFD9-270C-22EC-2975-5467CE816058}"/>
               </a:ext>
             </a:extLst>
           </p:cNvPr>
@@ -3665,7 +3665,7 @@
           <p:cNvPr id="3" name="テキスト ボックス 2">
             <a:extLst>
               <a:ext uri="{FF2B5EF4-FFF2-40B4-BE49-F238E27FC236}">
-                <a16:creationId xmlns:a16="http://schemas.microsoft.com/office/drawing/2014/main" id="{F7F94E2C-70DE-B350-902A-686BFDF68950}"/>
+                <a16:creationId xmlns:a16="http://schemas.microsoft.com/office/drawing/2014/main" id="{DF737E7D-FBF6-9133-BEC4-6618A058CBB2}"/>
               </a:ext>
             </a:extLst>
           </p:cNvPr>
@@ -3714,7 +3714,7 @@
           <p:cNvPr id="4" name="テキスト ボックス 3">
             <a:extLst>
               <a:ext uri="{FF2B5EF4-FFF2-40B4-BE49-F238E27FC236}">
-                <a16:creationId xmlns:a16="http://schemas.microsoft.com/office/drawing/2014/main" id="{F9AA5730-CFBF-AF29-8894-92059CDF6309}"/>
+                <a16:creationId xmlns:a16="http://schemas.microsoft.com/office/drawing/2014/main" id="{C686F9D6-181C-C1AE-2C16-606B969D7A7C}"/>
               </a:ext>
             </a:extLst>
           </p:cNvPr>
@@ -3754,7 +3754,7 @@
           <p:cNvPr id="5" name="テキスト ボックス 4">
             <a:extLst>
               <a:ext uri="{FF2B5EF4-FFF2-40B4-BE49-F238E27FC236}">
-                <a16:creationId xmlns:a16="http://schemas.microsoft.com/office/drawing/2014/main" id="{A87F2593-9D3E-F247-71F2-2C4BF2848532}"/>
+                <a16:creationId xmlns:a16="http://schemas.microsoft.com/office/drawing/2014/main" id="{E94716AF-F485-FF80-B781-84EB5D3E6507}"/>
               </a:ext>
             </a:extLst>
           </p:cNvPr>
@@ -3801,7 +3801,7 @@
             <a:hlinkClick r:id="" action="ppaction://media"/>
             <a:extLst>
               <a:ext uri="{FF2B5EF4-FFF2-40B4-BE49-F238E27FC236}">
-                <a16:creationId xmlns:a16="http://schemas.microsoft.com/office/drawing/2014/main" id="{9179288F-5FCF-87D4-12B8-71FD32C78CEA}"/>
+                <a16:creationId xmlns:a16="http://schemas.microsoft.com/office/drawing/2014/main" id="{6DB78FD3-8778-E389-FBC0-98682BABD71F}"/>
               </a:ext>
             </a:extLst>
           </p:cNvPr>
@@ -3836,7 +3836,7 @@
     </p:spTree>
     <p:extLst>
       <p:ext uri="{BB962C8B-B14F-4D97-AF65-F5344CB8AC3E}">
-        <p14:creationId xmlns:p14="http://schemas.microsoft.com/office/powerpoint/2010/main" val="1105067255"/>
+        <p14:creationId xmlns:p14="http://schemas.microsoft.com/office/powerpoint/2010/main" val="3845597499"/>
       </p:ext>
     </p:extLst>
   </p:cSld>
@@ -3960,7 +3960,7 @@
           <p:cNvPr id="2" name="テキスト ボックス 1">
             <a:extLst>
               <a:ext uri="{FF2B5EF4-FFF2-40B4-BE49-F238E27FC236}">
-                <a16:creationId xmlns:a16="http://schemas.microsoft.com/office/drawing/2014/main" id="{C7BA1DE2-7341-96F8-906E-1E934C5C1339}"/>
+                <a16:creationId xmlns:a16="http://schemas.microsoft.com/office/drawing/2014/main" id="{4836CC03-5E06-1876-1D51-CFE6D13F2192}"/>
               </a:ext>
             </a:extLst>
           </p:cNvPr>
@@ -4006,7 +4006,7 @@
           <p:cNvPr id="3" name="テキスト ボックス 2">
             <a:extLst>
               <a:ext uri="{FF2B5EF4-FFF2-40B4-BE49-F238E27FC236}">
-                <a16:creationId xmlns:a16="http://schemas.microsoft.com/office/drawing/2014/main" id="{9A38C7D4-85F7-80AA-E68D-F1D653F398AF}"/>
+                <a16:creationId xmlns:a16="http://schemas.microsoft.com/office/drawing/2014/main" id="{3BD3B235-CAD2-44C0-D074-A3BDCE3795EB}"/>
               </a:ext>
             </a:extLst>
           </p:cNvPr>
@@ -4046,7 +4046,7 @@
           <p:cNvPr id="4" name="テキスト ボックス 3">
             <a:extLst>
               <a:ext uri="{FF2B5EF4-FFF2-40B4-BE49-F238E27FC236}">
-                <a16:creationId xmlns:a16="http://schemas.microsoft.com/office/drawing/2014/main" id="{11011C14-1C4A-3911-6BF2-605CFB385A02}"/>
+                <a16:creationId xmlns:a16="http://schemas.microsoft.com/office/drawing/2014/main" id="{7960E2EA-6C17-CD43-63DC-37B29D3E9C24}"/>
               </a:ext>
             </a:extLst>
           </p:cNvPr>
@@ -4110,7 +4110,7 @@
           <p:cNvPr id="5" name="テキスト ボックス 4">
             <a:extLst>
               <a:ext uri="{FF2B5EF4-FFF2-40B4-BE49-F238E27FC236}">
-                <a16:creationId xmlns:a16="http://schemas.microsoft.com/office/drawing/2014/main" id="{C43F56C4-E62B-2D7D-10A3-457F79F533AB}"/>
+                <a16:creationId xmlns:a16="http://schemas.microsoft.com/office/drawing/2014/main" id="{08E15D23-E8B0-31F8-086C-EA1CB47A5BF6}"/>
               </a:ext>
             </a:extLst>
           </p:cNvPr>
@@ -4157,7 +4157,7 @@
             <a:hlinkClick r:id="" action="ppaction://media"/>
             <a:extLst>
               <a:ext uri="{FF2B5EF4-FFF2-40B4-BE49-F238E27FC236}">
-                <a16:creationId xmlns:a16="http://schemas.microsoft.com/office/drawing/2014/main" id="{CCA1F779-4B70-D472-0012-9DF188FF4B0C}"/>
+                <a16:creationId xmlns:a16="http://schemas.microsoft.com/office/drawing/2014/main" id="{C907A60C-AC46-164D-8378-7EC25D172E7D}"/>
               </a:ext>
             </a:extLst>
           </p:cNvPr>
@@ -4192,7 +4192,7 @@
     </p:spTree>
     <p:extLst>
       <p:ext uri="{BB962C8B-B14F-4D97-AF65-F5344CB8AC3E}">
-        <p14:creationId xmlns:p14="http://schemas.microsoft.com/office/powerpoint/2010/main" val="1397830994"/>
+        <p14:creationId xmlns:p14="http://schemas.microsoft.com/office/powerpoint/2010/main" val="3797661330"/>
       </p:ext>
     </p:extLst>
   </p:cSld>
@@ -4316,7 +4316,7 @@
           <p:cNvPr id="2" name="テキスト ボックス 1">
             <a:extLst>
               <a:ext uri="{FF2B5EF4-FFF2-40B4-BE49-F238E27FC236}">
-                <a16:creationId xmlns:a16="http://schemas.microsoft.com/office/drawing/2014/main" id="{B8A96553-4A2D-F1FB-026E-0309CFE5F364}"/>
+                <a16:creationId xmlns:a16="http://schemas.microsoft.com/office/drawing/2014/main" id="{CC78F657-1EA6-10D2-2C7E-3C6793D8CF3C}"/>
               </a:ext>
             </a:extLst>
           </p:cNvPr>
@@ -4362,7 +4362,7 @@
           <p:cNvPr id="3" name="テキスト ボックス 2">
             <a:extLst>
               <a:ext uri="{FF2B5EF4-FFF2-40B4-BE49-F238E27FC236}">
-                <a16:creationId xmlns:a16="http://schemas.microsoft.com/office/drawing/2014/main" id="{12843013-0D64-49E3-6DEC-44EA2C6B0097}"/>
+                <a16:creationId xmlns:a16="http://schemas.microsoft.com/office/drawing/2014/main" id="{51ABA77C-951D-9925-83D2-78702A7DE2B0}"/>
               </a:ext>
             </a:extLst>
           </p:cNvPr>
@@ -4402,7 +4402,7 @@
           <p:cNvPr id="4" name="テキスト ボックス 3">
             <a:extLst>
               <a:ext uri="{FF2B5EF4-FFF2-40B4-BE49-F238E27FC236}">
-                <a16:creationId xmlns:a16="http://schemas.microsoft.com/office/drawing/2014/main" id="{1F390B2D-1406-122B-4998-F31D694F6E9F}"/>
+                <a16:creationId xmlns:a16="http://schemas.microsoft.com/office/drawing/2014/main" id="{1571C05D-9DF7-5A10-8B8B-1D52DAE86778}"/>
               </a:ext>
             </a:extLst>
           </p:cNvPr>
@@ -4497,7 +4497,7 @@
           <p:cNvPr id="5" name="テキスト ボックス 4">
             <a:extLst>
               <a:ext uri="{FF2B5EF4-FFF2-40B4-BE49-F238E27FC236}">
-                <a16:creationId xmlns:a16="http://schemas.microsoft.com/office/drawing/2014/main" id="{81553B0E-0C4F-83FA-D0DB-0E18C0402902}"/>
+                <a16:creationId xmlns:a16="http://schemas.microsoft.com/office/drawing/2014/main" id="{390A0956-AF18-913F-3149-901D63B869E2}"/>
               </a:ext>
             </a:extLst>
           </p:cNvPr>
@@ -4544,7 +4544,7 @@
             <a:hlinkClick r:id="" action="ppaction://media"/>
             <a:extLst>
               <a:ext uri="{FF2B5EF4-FFF2-40B4-BE49-F238E27FC236}">
-                <a16:creationId xmlns:a16="http://schemas.microsoft.com/office/drawing/2014/main" id="{D1AC1B20-4D0E-996A-8D07-2E7B59FCDFD9}"/>
+                <a16:creationId xmlns:a16="http://schemas.microsoft.com/office/drawing/2014/main" id="{7BFA9551-07D3-8A7B-A858-6DF5C608DB3C}"/>
               </a:ext>
             </a:extLst>
           </p:cNvPr>
@@ -4579,7 +4579,7 @@
     </p:spTree>
     <p:extLst>
       <p:ext uri="{BB962C8B-B14F-4D97-AF65-F5344CB8AC3E}">
-        <p14:creationId xmlns:p14="http://schemas.microsoft.com/office/powerpoint/2010/main" val="3186506855"/>
+        <p14:creationId xmlns:p14="http://schemas.microsoft.com/office/powerpoint/2010/main" val="3668222510"/>
       </p:ext>
     </p:extLst>
   </p:cSld>
@@ -4703,7 +4703,7 @@
           <p:cNvPr id="2" name="テキスト ボックス 1">
             <a:extLst>
               <a:ext uri="{FF2B5EF4-FFF2-40B4-BE49-F238E27FC236}">
-                <a16:creationId xmlns:a16="http://schemas.microsoft.com/office/drawing/2014/main" id="{A88D3108-7C5A-2924-0F2A-7A4E0C7262D0}"/>
+                <a16:creationId xmlns:a16="http://schemas.microsoft.com/office/drawing/2014/main" id="{14D7C576-4924-F459-C372-DDEC356DFFA3}"/>
               </a:ext>
             </a:extLst>
           </p:cNvPr>
@@ -4749,7 +4749,7 @@
           <p:cNvPr id="3" name="テキスト ボックス 2">
             <a:extLst>
               <a:ext uri="{FF2B5EF4-FFF2-40B4-BE49-F238E27FC236}">
-                <a16:creationId xmlns:a16="http://schemas.microsoft.com/office/drawing/2014/main" id="{C4C6FE6B-8D4F-5C48-A963-CB1DEFD54560}"/>
+                <a16:creationId xmlns:a16="http://schemas.microsoft.com/office/drawing/2014/main" id="{A6623D71-6A32-5B4A-A9B8-4CD4F0875387}"/>
               </a:ext>
             </a:extLst>
           </p:cNvPr>
@@ -4789,7 +4789,7 @@
           <p:cNvPr id="4" name="テキスト ボックス 3">
             <a:extLst>
               <a:ext uri="{FF2B5EF4-FFF2-40B4-BE49-F238E27FC236}">
-                <a16:creationId xmlns:a16="http://schemas.microsoft.com/office/drawing/2014/main" id="{61AA133C-3273-428E-7057-3DC3D8FE5E79}"/>
+                <a16:creationId xmlns:a16="http://schemas.microsoft.com/office/drawing/2014/main" id="{0B45C87E-8541-DC10-B42B-400B69881155}"/>
               </a:ext>
             </a:extLst>
           </p:cNvPr>
@@ -4899,7 +4899,7 @@
           <p:cNvPr id="5" name="テキスト ボックス 4">
             <a:extLst>
               <a:ext uri="{FF2B5EF4-FFF2-40B4-BE49-F238E27FC236}">
-                <a16:creationId xmlns:a16="http://schemas.microsoft.com/office/drawing/2014/main" id="{DE31F710-A332-EACC-772D-D8575325B813}"/>
+                <a16:creationId xmlns:a16="http://schemas.microsoft.com/office/drawing/2014/main" id="{C0813E9A-003E-86F5-879E-E32ADB6EC50E}"/>
               </a:ext>
             </a:extLst>
           </p:cNvPr>
@@ -4946,7 +4946,7 @@
             <a:hlinkClick r:id="" action="ppaction://media"/>
             <a:extLst>
               <a:ext uri="{FF2B5EF4-FFF2-40B4-BE49-F238E27FC236}">
-                <a16:creationId xmlns:a16="http://schemas.microsoft.com/office/drawing/2014/main" id="{839B4F24-7B6B-432B-EF5D-11CCD71920F9}"/>
+                <a16:creationId xmlns:a16="http://schemas.microsoft.com/office/drawing/2014/main" id="{CF71F58B-C5BD-5D67-6864-1A2E6C99C9CC}"/>
               </a:ext>
             </a:extLst>
           </p:cNvPr>
@@ -4981,7 +4981,7 @@
     </p:spTree>
     <p:extLst>
       <p:ext uri="{BB962C8B-B14F-4D97-AF65-F5344CB8AC3E}">
-        <p14:creationId xmlns:p14="http://schemas.microsoft.com/office/powerpoint/2010/main" val="3885246733"/>
+        <p14:creationId xmlns:p14="http://schemas.microsoft.com/office/powerpoint/2010/main" val="3831009648"/>
       </p:ext>
     </p:extLst>
   </p:cSld>
@@ -5105,7 +5105,7 @@
           <p:cNvPr id="2" name="テキスト ボックス 1">
             <a:extLst>
               <a:ext uri="{FF2B5EF4-FFF2-40B4-BE49-F238E27FC236}">
-                <a16:creationId xmlns:a16="http://schemas.microsoft.com/office/drawing/2014/main" id="{8C405C2D-3990-4D92-8B3F-9977A333EC8B}"/>
+                <a16:creationId xmlns:a16="http://schemas.microsoft.com/office/drawing/2014/main" id="{0CA905EB-8A2D-0912-50A2-4FDFFE5E48E4}"/>
               </a:ext>
             </a:extLst>
           </p:cNvPr>
@@ -5151,7 +5151,7 @@
           <p:cNvPr id="3" name="テキスト ボックス 2">
             <a:extLst>
               <a:ext uri="{FF2B5EF4-FFF2-40B4-BE49-F238E27FC236}">
-                <a16:creationId xmlns:a16="http://schemas.microsoft.com/office/drawing/2014/main" id="{BA2532F0-9F08-7251-4E35-130025397491}"/>
+                <a16:creationId xmlns:a16="http://schemas.microsoft.com/office/drawing/2014/main" id="{0FD6FE2B-4FD4-CA36-4D0A-3B314042EFBF}"/>
               </a:ext>
             </a:extLst>
           </p:cNvPr>
@@ -5191,7 +5191,7 @@
           <p:cNvPr id="4" name="テキスト ボックス 3">
             <a:extLst>
               <a:ext uri="{FF2B5EF4-FFF2-40B4-BE49-F238E27FC236}">
-                <a16:creationId xmlns:a16="http://schemas.microsoft.com/office/drawing/2014/main" id="{983DA938-9F0B-6580-45D0-89D87365595A}"/>
+                <a16:creationId xmlns:a16="http://schemas.microsoft.com/office/drawing/2014/main" id="{0AEB9859-2BF1-F7AC-BCB8-D8522D0231FC}"/>
               </a:ext>
             </a:extLst>
           </p:cNvPr>
@@ -5215,20 +5215,14 @@
           <a:lstStyle/>
           <a:p>
             <a:r>
-              <a:rPr kumimoji="1" lang="en-US" altLang="ja-JP" sz="2000">
+              <a:rPr kumimoji="1" lang="ja-JP" altLang="en-US" sz="2000">
                 <a:solidFill>
                   <a:srgbClr val="333333"/>
                 </a:solidFill>
                 <a:latin typeface="Arial" panose="020B0604020202020204" pitchFamily="34" charset="0"/>
               </a:rPr>
-              <a:t>Set confirmed custom domain</a:t>
-            </a:r>
-            <a:endParaRPr kumimoji="1" lang="ja-JP" altLang="en-US" sz="2000">
-              <a:solidFill>
-                <a:srgbClr val="333333"/>
-              </a:solidFill>
-              <a:latin typeface="Arial" panose="020B0604020202020204" pitchFamily="34" charset="0"/>
-            </a:endParaRPr>
+              <a:t>直近のコミットでは、実装の見直しと継続的な改善が行われました。</a:t>
+            </a:r>
           </a:p>
         </p:txBody>
       </p:sp>
@@ -5237,7 +5231,7 @@
           <p:cNvPr id="5" name="テキスト ボックス 4">
             <a:extLst>
               <a:ext uri="{FF2B5EF4-FFF2-40B4-BE49-F238E27FC236}">
-                <a16:creationId xmlns:a16="http://schemas.microsoft.com/office/drawing/2014/main" id="{5205B8D2-6BF9-1934-CDFF-D88AA0A25E37}"/>
+                <a16:creationId xmlns:a16="http://schemas.microsoft.com/office/drawing/2014/main" id="{136DC79D-F0FB-5B3B-3076-FA592C82BD40}"/>
               </a:ext>
             </a:extLst>
           </p:cNvPr>
@@ -5284,7 +5278,7 @@
             <a:hlinkClick r:id="" action="ppaction://media"/>
             <a:extLst>
               <a:ext uri="{FF2B5EF4-FFF2-40B4-BE49-F238E27FC236}">
-                <a16:creationId xmlns:a16="http://schemas.microsoft.com/office/drawing/2014/main" id="{48FD6288-4966-F85C-6515-B161F59B91FA}"/>
+                <a16:creationId xmlns:a16="http://schemas.microsoft.com/office/drawing/2014/main" id="{A4AD8B11-5B20-88D2-0767-B774955490A7}"/>
               </a:ext>
             </a:extLst>
           </p:cNvPr>
@@ -5319,7 +5313,7 @@
     </p:spTree>
     <p:extLst>
       <p:ext uri="{BB962C8B-B14F-4D97-AF65-F5344CB8AC3E}">
-        <p14:creationId xmlns:p14="http://schemas.microsoft.com/office/powerpoint/2010/main" val="473296247"/>
+        <p14:creationId xmlns:p14="http://schemas.microsoft.com/office/powerpoint/2010/main" val="975484960"/>
       </p:ext>
     </p:extLst>
   </p:cSld>
@@ -5362,7 +5356,7 @@
                                   <p:childTnLst>
                                     <p:cmd type="call" cmd="playFrom(0.0)">
                                       <p:cBhvr>
-                                        <p:cTn id="6" dur="6451" fill="hold"/>
+                                        <p:cTn id="6" dur="6076" fill="hold"/>
                                         <p:tgtEl>
                                           <p:spTgt spid="6"/>
                                         </p:tgtEl>
@@ -5443,7 +5437,7 @@
           <p:cNvPr id="2" name="テキスト ボックス 1">
             <a:extLst>
               <a:ext uri="{FF2B5EF4-FFF2-40B4-BE49-F238E27FC236}">
-                <a16:creationId xmlns:a16="http://schemas.microsoft.com/office/drawing/2014/main" id="{BAD6454E-F140-4774-4E88-10F9A8FB9FB8}"/>
+                <a16:creationId xmlns:a16="http://schemas.microsoft.com/office/drawing/2014/main" id="{79499CAF-70EC-0B49-617E-551E6BF0B091}"/>
               </a:ext>
             </a:extLst>
           </p:cNvPr>
@@ -5489,7 +5483,7 @@
           <p:cNvPr id="3" name="テキスト ボックス 2">
             <a:extLst>
               <a:ext uri="{FF2B5EF4-FFF2-40B4-BE49-F238E27FC236}">
-                <a16:creationId xmlns:a16="http://schemas.microsoft.com/office/drawing/2014/main" id="{F478D823-1C65-A17D-E75C-7ABE324FEB71}"/>
+                <a16:creationId xmlns:a16="http://schemas.microsoft.com/office/drawing/2014/main" id="{C7829C2B-8BAA-6DF2-0012-A2AC42298781}"/>
               </a:ext>
             </a:extLst>
           </p:cNvPr>
@@ -5529,7 +5523,7 @@
           <p:cNvPr id="4" name="テキスト ボックス 3">
             <a:extLst>
               <a:ext uri="{FF2B5EF4-FFF2-40B4-BE49-F238E27FC236}">
-                <a16:creationId xmlns:a16="http://schemas.microsoft.com/office/drawing/2014/main" id="{D07B5EA1-8181-89B4-BCBB-332BC00D6813}"/>
+                <a16:creationId xmlns:a16="http://schemas.microsoft.com/office/drawing/2014/main" id="{C601B065-7C39-6071-DFBE-BFDE1720971D}"/>
               </a:ext>
             </a:extLst>
           </p:cNvPr>
@@ -5594,7 +5588,7 @@
           <p:cNvPr id="5" name="テキスト ボックス 4">
             <a:extLst>
               <a:ext uri="{FF2B5EF4-FFF2-40B4-BE49-F238E27FC236}">
-                <a16:creationId xmlns:a16="http://schemas.microsoft.com/office/drawing/2014/main" id="{8937E5D6-AA4B-ACCC-FC11-6FA0671F63DE}"/>
+                <a16:creationId xmlns:a16="http://schemas.microsoft.com/office/drawing/2014/main" id="{F708F525-92C3-780B-F7F7-AFBB26AB4223}"/>
               </a:ext>
             </a:extLst>
           </p:cNvPr>
@@ -5641,7 +5635,7 @@
             <a:hlinkClick r:id="" action="ppaction://media"/>
             <a:extLst>
               <a:ext uri="{FF2B5EF4-FFF2-40B4-BE49-F238E27FC236}">
-                <a16:creationId xmlns:a16="http://schemas.microsoft.com/office/drawing/2014/main" id="{D832415D-233D-B110-F206-C0BF0F4D3A3F}"/>
+                <a16:creationId xmlns:a16="http://schemas.microsoft.com/office/drawing/2014/main" id="{B3EB64FF-575C-0A4E-FF60-1AE73247F193}"/>
               </a:ext>
             </a:extLst>
           </p:cNvPr>
@@ -5676,7 +5670,7 @@
     </p:spTree>
     <p:extLst>
       <p:ext uri="{BB962C8B-B14F-4D97-AF65-F5344CB8AC3E}">
-        <p14:creationId xmlns:p14="http://schemas.microsoft.com/office/powerpoint/2010/main" val="2175205912"/>
+        <p14:creationId xmlns:p14="http://schemas.microsoft.com/office/powerpoint/2010/main" val="985692046"/>
       </p:ext>
     </p:extLst>
   </p:cSld>
